--- a/ConfigWatcher_AI 编程马拉松作品.pptx
+++ b/ConfigWatcher_AI 编程马拉松作品.pptx
@@ -10,8 +10,13 @@
     <p:sldId id="258" r:id="rId5"/>
     <p:sldId id="259" r:id="rId6"/>
     <p:sldId id="260" r:id="rId7"/>
-    <p:sldId id="261" r:id="rId8"/>
-    <p:sldId id="262" r:id="rId9"/>
+    <p:sldId id="264" r:id="rId8"/>
+    <p:sldId id="265" r:id="rId9"/>
+    <p:sldId id="267" r:id="rId10"/>
+    <p:sldId id="268" r:id="rId11"/>
+    <p:sldId id="266" r:id="rId12"/>
+    <p:sldId id="261" r:id="rId13"/>
+    <p:sldId id="262" r:id="rId14"/>
   </p:sldIdLst>
   <p:sldSz cx="12191365" cy="6858000" type="screen4x3"/>
   <p:notesSz cx="6858000" cy="9144000"/>
@@ -118,7 +123,7 @@
             <a:srgbClr val="A4A3A4"/>
           </p15:clr>
         </p15:guide>
-        <p15:guide id="2" pos="2880" userDrawn="1">
+        <p15:guide id="2" pos="2905" userDrawn="1">
           <p15:clr>
             <a:srgbClr val="A4A3A4"/>
           </p15:clr>
@@ -3259,7 +3264,7 @@
 </p:sld>
 </file>
 
-<file path=ppt/slides/slide2.xml><?xml version="1.0" encoding="utf-8"?>
+<file path=ppt/slides/slide10.xml><?xml version="1.0" encoding="utf-8"?>
 <p:sld xmlns:a="http://schemas.openxmlformats.org/drawingml/2006/main" xmlns:r="http://schemas.openxmlformats.org/officeDocument/2006/relationships" xmlns:p="http://schemas.openxmlformats.org/presentationml/2006/main">
   <p:cSld>
     <p:spTree>
@@ -3341,7 +3346,7 @@
                 </a:solidFill>
                 <a:latin typeface="微软雅黑"/>
               </a:rPr>
-              <a:t>1. 项目速览（30 秒电梯演讲）</a:t>
+              <a:t>4. 成果验证</a:t>
             </a:r>
             <a:endParaRPr sz="3000" b="1">
               <a:solidFill>
@@ -3352,16 +3357,64 @@
           </a:p>
         </p:txBody>
       </p:sp>
-      <p:sp>
-        <p:nvSpPr>
-          <p:cNvPr id="4" name="TextBox 3"/>
+      <p:pic>
+        <p:nvPicPr>
+          <p:cNvPr id="5" name="图片 4"/>
+          <p:cNvPicPr>
+            <a:picLocks noChangeAspect="1"/>
+          </p:cNvPicPr>
+          <p:nvPr/>
+        </p:nvPicPr>
+        <p:blipFill>
+          <a:blip r:embed="rId1"/>
+          <a:stretch>
+            <a:fillRect/>
+          </a:stretch>
+        </p:blipFill>
+        <p:spPr>
+          <a:xfrm>
+            <a:off x="250825" y="1318260"/>
+            <a:ext cx="5178425" cy="3266440"/>
+          </a:xfrm>
+          <a:prstGeom prst="rect">
+            <a:avLst/>
+          </a:prstGeom>
+        </p:spPr>
+      </p:pic>
+      <p:pic>
+        <p:nvPicPr>
+          <p:cNvPr id="6" name="图片 5"/>
+          <p:cNvPicPr>
+            <a:picLocks noChangeAspect="1"/>
+          </p:cNvPicPr>
+          <p:nvPr/>
+        </p:nvPicPr>
+        <p:blipFill>
+          <a:blip r:embed="rId2"/>
+          <a:stretch>
+            <a:fillRect/>
+          </a:stretch>
+        </p:blipFill>
+        <p:spPr>
+          <a:xfrm>
+            <a:off x="6012180" y="2915920"/>
+            <a:ext cx="5823585" cy="3672840"/>
+          </a:xfrm>
+          <a:prstGeom prst="rect">
+            <a:avLst/>
+          </a:prstGeom>
+        </p:spPr>
+      </p:pic>
+      <p:sp>
+        <p:nvSpPr>
+          <p:cNvPr id="7" name="文本框 6"/>
           <p:cNvSpPr txBox="1"/>
           <p:nvPr/>
         </p:nvSpPr>
         <p:spPr>
           <a:xfrm>
-            <a:off x="640080" y="1371600"/>
-            <a:ext cx="10972800" cy="5405755"/>
+            <a:off x="7279005" y="1504950"/>
+            <a:ext cx="4064000" cy="368300"/>
           </a:xfrm>
           <a:prstGeom prst="rect">
             <a:avLst/>
@@ -3369,279 +3422,15 @@
           <a:noFill/>
         </p:spPr>
         <p:txBody>
-          <a:bodyPr wrap="square">
+          <a:bodyPr wrap="square" rtlCol="0">
             <a:spAutoFit/>
           </a:bodyPr>
-          <a:lstStyle/>
-          <a:p>
-            <a:pPr>
-              <a:spcAft>
-                <a:spcPts val="1200"/>
-              </a:spcAft>
-            </a:pPr>
-            <a:r>
-              <a:rPr sz="2200" b="1">
-                <a:solidFill>
-                  <a:srgbClr val="2563EB"/>
-                </a:solidFill>
-                <a:latin typeface="微软雅黑"/>
-              </a:rPr>
-              <a:t>【核心问题】</a:t>
-            </a:r>
-            <a:endParaRPr sz="2200" b="1">
-              <a:solidFill>
-                <a:srgbClr val="2563EB"/>
-              </a:solidFill>
-              <a:latin typeface="微软雅黑"/>
-            </a:endParaRPr>
-          </a:p>
-          <a:p>
-            <a:pPr>
-              <a:spcAft>
-                <a:spcPts val="800"/>
-              </a:spcAft>
-            </a:pPr>
-            <a:r>
-              <a:rPr sz="2000" b="0">
-                <a:solidFill>
-                  <a:srgbClr val="323232"/>
-                </a:solidFill>
-                <a:latin typeface="微软雅黑"/>
-              </a:rPr>
-              <a:t>• AOI 设备配置文件繁杂（INI/JSON/XML），工程师查找配置项耗时费力</a:t>
-            </a:r>
-            <a:endParaRPr sz="2000" b="0">
-              <a:solidFill>
-                <a:srgbClr val="323232"/>
-              </a:solidFill>
-              <a:latin typeface="微软雅黑"/>
-            </a:endParaRPr>
-          </a:p>
-          <a:p>
-            <a:pPr>
-              <a:spcAft>
-                <a:spcPts val="800"/>
-              </a:spcAft>
-            </a:pPr>
-            <a:r>
-              <a:rPr sz="2000">
-                <a:solidFill>
-                  <a:srgbClr val="323232"/>
-                </a:solidFill>
-                <a:latin typeface="微软雅黑"/>
-                <a:sym typeface="+mn-ea"/>
-              </a:rPr>
-              <a:t>•</a:t>
-            </a:r>
-            <a:r>
-              <a:rPr lang="en-US" sz="2000">
-                <a:solidFill>
-                  <a:srgbClr val="323232"/>
-                </a:solidFill>
-                <a:latin typeface="微软雅黑"/>
-                <a:sym typeface="+mn-ea"/>
-              </a:rPr>
-              <a:t> </a:t>
-            </a:r>
-            <a:r>
-              <a:rPr lang="zh-CN" sz="2000" b="0">
-                <a:solidFill>
-                  <a:srgbClr val="323232"/>
-                </a:solidFill>
-                <a:latin typeface="微软雅黑"/>
-              </a:rPr>
-              <a:t>对配置不熟悉，或者长时间未接触配置文件，可能造成遗忘，导致查找具体字段困难。</a:t>
-            </a:r>
-            <a:endParaRPr lang="zh-CN" sz="2000" b="0">
-              <a:solidFill>
-                <a:srgbClr val="323232"/>
-              </a:solidFill>
-              <a:latin typeface="微软雅黑"/>
-            </a:endParaRPr>
-          </a:p>
-          <a:p>
-            <a:pPr>
-              <a:spcAft>
-                <a:spcPts val="800"/>
-              </a:spcAft>
-            </a:pPr>
-            <a:r>
-              <a:rPr sz="2000">
-                <a:solidFill>
-                  <a:srgbClr val="323232"/>
-                </a:solidFill>
-                <a:latin typeface="微软雅黑"/>
-                <a:sym typeface="+mn-ea"/>
-              </a:rPr>
-              <a:t>•</a:t>
-            </a:r>
-            <a:r>
-              <a:rPr lang="zh-CN" sz="2000" b="1">
-                <a:solidFill>
-                  <a:srgbClr val="323232"/>
-                </a:solidFill>
-                <a:latin typeface="微软雅黑"/>
-              </a:rPr>
-              <a:t> 非开发人员在调试问题时，对配置文件不熟悉，花费大量时间排查后，找到专业人员才定位到配置文件问题，做了无用功</a:t>
-            </a:r>
-            <a:endParaRPr lang="zh-CN" sz="2000" b="1">
-              <a:solidFill>
-                <a:srgbClr val="323232"/>
-              </a:solidFill>
-              <a:latin typeface="微软雅黑"/>
-            </a:endParaRPr>
-          </a:p>
-          <a:p>
-            <a:pPr>
-              <a:spcAft>
-                <a:spcPts val="800"/>
-              </a:spcAft>
-            </a:pPr>
-            <a:r>
-              <a:rPr sz="2000">
-                <a:solidFill>
-                  <a:srgbClr val="323232"/>
-                </a:solidFill>
-                <a:latin typeface="微软雅黑"/>
-                <a:sym typeface="+mn-ea"/>
-              </a:rPr>
-              <a:t>•</a:t>
-            </a:r>
-            <a:r>
-              <a:rPr lang="zh-CN" sz="2000" b="1">
-                <a:solidFill>
-                  <a:srgbClr val="323232"/>
-                </a:solidFill>
-                <a:latin typeface="微软雅黑"/>
-              </a:rPr>
-              <a:t> 配置文件应该受到管控，对于配置文件的修改应当有记录可查，不然可能在某个无人在意的角落有时会偷偷修改配置，导致出现问题后，其他不知情人员排查困难</a:t>
-            </a:r>
-            <a:endParaRPr sz="2000" b="0">
-              <a:solidFill>
-                <a:srgbClr val="323232"/>
-              </a:solidFill>
-              <a:latin typeface="微软雅黑"/>
-            </a:endParaRPr>
-          </a:p>
-          <a:p>
-            <a:pPr>
-              <a:spcAft>
-                <a:spcPts val="1200"/>
-              </a:spcAft>
-            </a:pPr>
-          </a:p>
-          <a:p>
-            <a:pPr>
-              <a:spcAft>
-                <a:spcPts val="1200"/>
-              </a:spcAft>
-            </a:pPr>
-            <a:r>
-              <a:rPr sz="2200" b="1">
-                <a:solidFill>
-                  <a:srgbClr val="2563EB"/>
-                </a:solidFill>
-                <a:latin typeface="微软雅黑"/>
-              </a:rPr>
-              <a:t>【AI 解决方案】</a:t>
-            </a:r>
-            <a:endParaRPr sz="2200" b="1">
-              <a:solidFill>
-                <a:srgbClr val="2563EB"/>
-              </a:solidFill>
-              <a:latin typeface="微软雅黑"/>
-            </a:endParaRPr>
-          </a:p>
-          <a:p>
-            <a:pPr>
-              <a:spcAft>
-                <a:spcPts val="800"/>
-              </a:spcAft>
-            </a:pPr>
-            <a:r>
-              <a:rPr sz="2000" b="0">
-                <a:solidFill>
-                  <a:srgbClr val="323232"/>
-                </a:solidFill>
-                <a:latin typeface="微软雅黑"/>
-              </a:rPr>
-              <a:t>• 基于意图识别和同义词扩展的智能配置搜索工具，让</a:t>
-            </a:r>
-            <a:r>
-              <a:rPr lang="zh-CN" sz="2000" b="0">
-                <a:solidFill>
-                  <a:srgbClr val="323232"/>
-                </a:solidFill>
-                <a:latin typeface="微软雅黑"/>
-              </a:rPr>
-              <a:t>使用者</a:t>
-            </a:r>
-            <a:r>
-              <a:rPr sz="2000" b="0">
-                <a:solidFill>
-                  <a:srgbClr val="323232"/>
-                </a:solidFill>
-                <a:latin typeface="微软雅黑"/>
-              </a:rPr>
-              <a:t>用自然语言快速定位配置</a:t>
-            </a:r>
-            <a:endParaRPr sz="2000" b="0">
-              <a:solidFill>
-                <a:srgbClr val="323232"/>
-              </a:solidFill>
-              <a:latin typeface="微软雅黑"/>
-            </a:endParaRPr>
-          </a:p>
-          <a:p>
-            <a:pPr>
-              <a:spcAft>
-                <a:spcPts val="1200"/>
-              </a:spcAft>
-            </a:pPr>
-          </a:p>
-          <a:p>
-            <a:pPr>
-              <a:spcAft>
-                <a:spcPts val="1200"/>
-              </a:spcAft>
-            </a:pPr>
-            <a:r>
-              <a:rPr sz="2200" b="1">
-                <a:solidFill>
-                  <a:srgbClr val="2563EB"/>
-                </a:solidFill>
-                <a:latin typeface="微软雅黑"/>
-              </a:rPr>
-              <a:t>【目标用户/场景】</a:t>
-            </a:r>
-            <a:endParaRPr sz="2200" b="1">
-              <a:solidFill>
-                <a:srgbClr val="2563EB"/>
-              </a:solidFill>
-              <a:latin typeface="微软雅黑"/>
-            </a:endParaRPr>
-          </a:p>
-          <a:p>
-            <a:pPr>
-              <a:spcAft>
-                <a:spcPts val="800"/>
-              </a:spcAft>
-            </a:pPr>
-            <a:r>
-              <a:rPr sz="2000" b="0">
-                <a:solidFill>
-                  <a:srgbClr val="323232"/>
-                </a:solidFill>
-                <a:latin typeface="微软雅黑"/>
-              </a:rPr>
-              <a:t>• AOI 设备调试工程师、维护人员，需要在数百个配置项中快速定位参数</a:t>
-            </a:r>
-            <a:endParaRPr sz="2000" b="0">
-              <a:solidFill>
-                <a:srgbClr val="323232"/>
-              </a:solidFill>
-              <a:latin typeface="微软雅黑"/>
-            </a:endParaRPr>
+          <a:p>
+            <a:r>
+              <a:rPr lang="zh-CN" altLang="en-US"/>
+              <a:t>修改记录监控</a:t>
+            </a:r>
+            <a:endParaRPr lang="zh-CN" altLang="en-US"/>
           </a:p>
         </p:txBody>
       </p:sp>
@@ -3653,7 +3442,7 @@
 </p:sld>
 </file>
 
-<file path=ppt/slides/slide3.xml><?xml version="1.0" encoding="utf-8"?>
+<file path=ppt/slides/slide11.xml><?xml version="1.0" encoding="utf-8"?>
 <p:sld xmlns:a="http://schemas.openxmlformats.org/drawingml/2006/main" xmlns:r="http://schemas.openxmlformats.org/officeDocument/2006/relationships" xmlns:p="http://schemas.openxmlformats.org/presentationml/2006/main">
   <p:cSld>
     <p:spTree>
@@ -3735,7 +3524,7 @@
                 </a:solidFill>
                 <a:latin typeface="微软雅黑"/>
               </a:rPr>
-              <a:t>2. AI 如何解决 - 方法与创新</a:t>
+              <a:t>5. 总结与迭代</a:t>
             </a:r>
             <a:endParaRPr sz="3000" b="1">
               <a:solidFill>
@@ -3754,8 +3543,8 @@
         </p:nvSpPr>
         <p:spPr>
           <a:xfrm>
-            <a:off x="640080" y="1371600"/>
-            <a:ext cx="10972800" cy="5029200"/>
+            <a:off x="457200" y="1371600"/>
+            <a:ext cx="5486400" cy="5029200"/>
           </a:xfrm>
           <a:prstGeom prst="rect">
             <a:avLst/>
@@ -3768,6 +3557,539 @@
           </a:bodyPr>
           <a:lstStyle/>
           <a:p>
+            <a:r>
+              <a:rPr sz="2400" b="1">
+                <a:solidFill>
+                  <a:srgbClr val="2563EB"/>
+                </a:solidFill>
+                <a:latin typeface="微软雅黑"/>
+              </a:rPr>
+              <a:t>【已实现功能】</a:t>
+            </a:r>
+            <a:endParaRPr sz="2400" b="1">
+              <a:solidFill>
+                <a:srgbClr val="2563EB"/>
+              </a:solidFill>
+              <a:latin typeface="微软雅黑"/>
+            </a:endParaRPr>
+          </a:p>
+          <a:p>
+            <a:pPr>
+              <a:spcAft>
+                <a:spcPts val="1000"/>
+              </a:spcAft>
+            </a:pPr>
+            <a:r>
+              <a:rPr sz="1900" b="0">
+                <a:solidFill>
+                  <a:srgbClr val="323232"/>
+                </a:solidFill>
+                <a:latin typeface="微软雅黑"/>
+              </a:rPr>
+              <a:t>✓ 意图识别引擎：5 种意图类型 + 置信度评估</a:t>
+            </a:r>
+            <a:endParaRPr sz="1900" b="0">
+              <a:solidFill>
+                <a:srgbClr val="323232"/>
+              </a:solidFill>
+              <a:latin typeface="微软雅黑"/>
+            </a:endParaRPr>
+          </a:p>
+          <a:p>
+            <a:pPr>
+              <a:spcAft>
+                <a:spcPts val="1000"/>
+              </a:spcAft>
+            </a:pPr>
+            <a:r>
+              <a:rPr sz="1900" b="0">
+                <a:solidFill>
+                  <a:srgbClr val="323232"/>
+                </a:solidFill>
+                <a:latin typeface="微软雅黑"/>
+              </a:rPr>
+              <a:t>✓ 同义词词典：100+ 领域术语映射（相机/光学/标定/3D）</a:t>
+            </a:r>
+            <a:endParaRPr sz="1900" b="0">
+              <a:solidFill>
+                <a:srgbClr val="323232"/>
+              </a:solidFill>
+              <a:latin typeface="微软雅黑"/>
+            </a:endParaRPr>
+          </a:p>
+          <a:p>
+            <a:pPr>
+              <a:spcAft>
+                <a:spcPts val="1000"/>
+              </a:spcAft>
+            </a:pPr>
+            <a:r>
+              <a:rPr sz="1900" b="0">
+                <a:solidFill>
+                  <a:srgbClr val="323232"/>
+                </a:solidFill>
+                <a:latin typeface="微软雅黑"/>
+              </a:rPr>
+              <a:t>✓ 双模式 UI：完整模式 + 精简模式（全局快捷键切换）</a:t>
+            </a:r>
+            <a:endParaRPr sz="1900" b="0">
+              <a:solidFill>
+                <a:srgbClr val="323232"/>
+              </a:solidFill>
+              <a:latin typeface="微软雅黑"/>
+            </a:endParaRPr>
+          </a:p>
+          <a:p>
+            <a:pPr>
+              <a:spcAft>
+                <a:spcPts val="1000"/>
+              </a:spcAft>
+            </a:pPr>
+            <a:r>
+              <a:rPr sz="1900" b="0">
+                <a:solidFill>
+                  <a:srgbClr val="323232"/>
+                </a:solidFill>
+                <a:latin typeface="微软雅黑"/>
+              </a:rPr>
+              <a:t>✓ 多格式支持：INI / JSON / XML 配置文件解析</a:t>
+            </a:r>
+            <a:endParaRPr sz="1900" b="0">
+              <a:solidFill>
+                <a:srgbClr val="323232"/>
+              </a:solidFill>
+              <a:latin typeface="微软雅黑"/>
+            </a:endParaRPr>
+          </a:p>
+          <a:p>
+            <a:pPr>
+              <a:spcAft>
+                <a:spcPts val="1000"/>
+              </a:spcAft>
+            </a:pPr>
+            <a:r>
+              <a:rPr sz="1900" b="0">
+                <a:solidFill>
+                  <a:srgbClr val="323232"/>
+                </a:solidFill>
+                <a:latin typeface="微软雅黑"/>
+              </a:rPr>
+              <a:t>✓ 用户词典：支持自定义术语和搜索历史学习</a:t>
+            </a:r>
+            <a:endParaRPr sz="1900" b="0">
+              <a:solidFill>
+                <a:srgbClr val="323232"/>
+              </a:solidFill>
+              <a:latin typeface="微软雅黑"/>
+            </a:endParaRPr>
+          </a:p>
+        </p:txBody>
+      </p:sp>
+      <p:sp>
+        <p:nvSpPr>
+          <p:cNvPr id="5" name="TextBox 4"/>
+          <p:cNvSpPr txBox="1"/>
+          <p:nvPr/>
+        </p:nvSpPr>
+        <p:spPr>
+          <a:xfrm>
+            <a:off x="6400800" y="1371600"/>
+            <a:ext cx="5486400" cy="2727960"/>
+          </a:xfrm>
+          <a:prstGeom prst="rect">
+            <a:avLst/>
+          </a:prstGeom>
+          <a:noFill/>
+        </p:spPr>
+        <p:txBody>
+          <a:bodyPr wrap="square">
+            <a:spAutoFit/>
+          </a:bodyPr>
+          <a:lstStyle/>
+          <a:p>
+            <a:r>
+              <a:rPr sz="2400" b="1">
+                <a:solidFill>
+                  <a:srgbClr val="2563EB"/>
+                </a:solidFill>
+                <a:latin typeface="微软雅黑"/>
+              </a:rPr>
+              <a:t>【迭代计划 🚀】</a:t>
+            </a:r>
+            <a:endParaRPr sz="2400" b="1">
+              <a:solidFill>
+                <a:srgbClr val="2563EB"/>
+              </a:solidFill>
+              <a:latin typeface="微软雅黑"/>
+            </a:endParaRPr>
+          </a:p>
+          <a:p>
+            <a:pPr>
+              <a:spcAft>
+                <a:spcPts val="1000"/>
+              </a:spcAft>
+            </a:pPr>
+            <a:r>
+              <a:rPr sz="1900" b="0">
+                <a:solidFill>
+                  <a:srgbClr val="323232"/>
+                </a:solidFill>
+                <a:latin typeface="微软雅黑"/>
+              </a:rPr>
+              <a:t>► 接入 LLM 大模型，实现更强大的自然语言理解</a:t>
+            </a:r>
+            <a:endParaRPr sz="1900" b="0">
+              <a:solidFill>
+                <a:srgbClr val="323232"/>
+              </a:solidFill>
+              <a:latin typeface="微软雅黑"/>
+            </a:endParaRPr>
+          </a:p>
+          <a:p>
+            <a:pPr>
+              <a:spcAft>
+                <a:spcPts val="1000"/>
+              </a:spcAft>
+            </a:pPr>
+            <a:r>
+              <a:rPr sz="1900" b="0">
+                <a:solidFill>
+                  <a:srgbClr val="323232"/>
+                </a:solidFill>
+                <a:latin typeface="微软雅黑"/>
+              </a:rPr>
+              <a:t>► 支持配置项智能推荐和异常检测</a:t>
+            </a:r>
+            <a:endParaRPr sz="1900" b="0">
+              <a:solidFill>
+                <a:srgbClr val="323232"/>
+              </a:solidFill>
+              <a:latin typeface="微软雅黑"/>
+            </a:endParaRPr>
+          </a:p>
+          <a:p>
+            <a:pPr>
+              <a:spcAft>
+                <a:spcPts val="1000"/>
+              </a:spcAft>
+            </a:pPr>
+            <a:r>
+              <a:rPr sz="1900" b="0">
+                <a:solidFill>
+                  <a:srgbClr val="323232"/>
+                </a:solidFill>
+                <a:latin typeface="微软雅黑"/>
+              </a:rPr>
+              <a:t>► 增加配置变更影响分析功能</a:t>
+            </a:r>
+            <a:endParaRPr sz="1900" b="0">
+              <a:solidFill>
+                <a:srgbClr val="323232"/>
+              </a:solidFill>
+              <a:latin typeface="微软雅黑"/>
+            </a:endParaRPr>
+          </a:p>
+          <a:p>
+            <a:pPr>
+              <a:spcAft>
+                <a:spcPts val="1000"/>
+              </a:spcAft>
+            </a:pPr>
+            <a:r>
+              <a:rPr sz="1900" b="0">
+                <a:solidFill>
+                  <a:srgbClr val="323232"/>
+                </a:solidFill>
+                <a:latin typeface="微软雅黑"/>
+              </a:rPr>
+              <a:t>► 扩展更多工业领域词典（PLC/机器人/传感器）</a:t>
+            </a:r>
+            <a:endParaRPr sz="1900" b="0">
+              <a:solidFill>
+                <a:srgbClr val="323232"/>
+              </a:solidFill>
+              <a:latin typeface="微软雅黑"/>
+            </a:endParaRPr>
+          </a:p>
+          <a:p>
+            <a:pPr>
+              <a:spcAft>
+                <a:spcPts val="1000"/>
+              </a:spcAft>
+            </a:pPr>
+            <a:r>
+              <a:rPr sz="1900">
+                <a:solidFill>
+                  <a:srgbClr val="323232"/>
+                </a:solidFill>
+                <a:latin typeface="微软雅黑"/>
+                <a:sym typeface="+mn-ea"/>
+              </a:rPr>
+              <a:t>► </a:t>
+            </a:r>
+            <a:r>
+              <a:rPr lang="zh-CN" sz="1900">
+                <a:solidFill>
+                  <a:srgbClr val="323232"/>
+                </a:solidFill>
+                <a:latin typeface="微软雅黑"/>
+                <a:sym typeface="+mn-ea"/>
+              </a:rPr>
+              <a:t>联网咨询，如果有某些字段不确定，可以通过联网提供询问，其他人实时回答</a:t>
+            </a:r>
+            <a:endParaRPr lang="zh-CN" sz="1900" b="0">
+              <a:solidFill>
+                <a:srgbClr val="323232"/>
+              </a:solidFill>
+              <a:latin typeface="微软雅黑"/>
+              <a:sym typeface="+mn-ea"/>
+            </a:endParaRPr>
+          </a:p>
+        </p:txBody>
+      </p:sp>
+    </p:spTree>
+  </p:cSld>
+  <p:clrMapOvr>
+    <a:masterClrMapping/>
+  </p:clrMapOvr>
+</p:sld>
+</file>
+
+<file path=ppt/slides/slide12.xml><?xml version="1.0" encoding="utf-8"?>
+<p:sld xmlns:a="http://schemas.openxmlformats.org/drawingml/2006/main" xmlns:r="http://schemas.openxmlformats.org/officeDocument/2006/relationships" xmlns:p="http://schemas.openxmlformats.org/presentationml/2006/main">
+  <p:cSld>
+    <p:spTree>
+      <p:nvGrpSpPr>
+        <p:cNvPr id="1" name=""/>
+        <p:cNvGrpSpPr/>
+        <p:nvPr/>
+      </p:nvGrpSpPr>
+      <p:grpSpPr/>
+      <p:sp>
+        <p:nvSpPr>
+          <p:cNvPr id="2" name="Rectangle 1"/>
+          <p:cNvSpPr/>
+          <p:nvPr/>
+        </p:nvSpPr>
+        <p:spPr>
+          <a:xfrm>
+            <a:off x="0" y="0"/>
+            <a:ext cx="12191695" cy="6858000"/>
+          </a:xfrm>
+          <a:prstGeom prst="rect">
+            <a:avLst/>
+          </a:prstGeom>
+          <a:solidFill>
+            <a:srgbClr val="2563EB"/>
+          </a:solidFill>
+          <a:ln>
+            <a:noFill/>
+          </a:ln>
+        </p:spPr>
+        <p:style>
+          <a:lnRef idx="1">
+            <a:schemeClr val="accent1"/>
+          </a:lnRef>
+          <a:fillRef idx="3">
+            <a:schemeClr val="accent1"/>
+          </a:fillRef>
+          <a:effectRef idx="2">
+            <a:schemeClr val="accent1"/>
+          </a:effectRef>
+          <a:fontRef idx="minor">
+            <a:schemeClr val="lt1"/>
+          </a:fontRef>
+        </p:style>
+        <p:txBody>
+          <a:bodyPr rtlCol="0" anchor="ctr"/>
+          <a:lstStyle/>
+          <a:p>
+            <a:pPr algn="ctr"/>
+          </a:p>
+        </p:txBody>
+      </p:sp>
+      <p:sp>
+        <p:nvSpPr>
+          <p:cNvPr id="3" name="TextBox 2"/>
+          <p:cNvSpPr txBox="1"/>
+          <p:nvPr/>
+        </p:nvSpPr>
+        <p:spPr>
+          <a:xfrm>
+            <a:off x="457200" y="1828800"/>
+            <a:ext cx="10972800" cy="1828800"/>
+          </a:xfrm>
+          <a:prstGeom prst="rect">
+            <a:avLst/>
+          </a:prstGeom>
+          <a:noFill/>
+        </p:spPr>
+        <p:txBody>
+          <a:bodyPr wrap="none">
+            <a:spAutoFit/>
+          </a:bodyPr>
+          <a:lstStyle/>
+          <a:p>
+            <a:pPr algn="ctr"/>
+            <a:r>
+              <a:rPr sz="4800" b="1">
+                <a:solidFill>
+                  <a:srgbClr val="FFFFFF"/>
+                </a:solidFill>
+                <a:latin typeface="微软雅黑"/>
+              </a:rPr>
+              <a:t>感谢聆听！</a:t>
+            </a:r>
+            <a:endParaRPr sz="4800" b="1">
+              <a:solidFill>
+                <a:srgbClr val="FFFFFF"/>
+              </a:solidFill>
+              <a:latin typeface="微软雅黑"/>
+            </a:endParaRPr>
+          </a:p>
+          <a:p>
+            <a:pPr algn="ctr"/>
+            <a:r>
+              <a:rPr sz="3600" b="0">
+                <a:solidFill>
+                  <a:srgbClr val="FFFFFF"/>
+                </a:solidFill>
+                <a:latin typeface="微软雅黑"/>
+              </a:rPr>
+              <a:t>Q &amp; A</a:t>
+            </a:r>
+            <a:endParaRPr sz="3600" b="0">
+              <a:solidFill>
+                <a:srgbClr val="FFFFFF"/>
+              </a:solidFill>
+              <a:latin typeface="微软雅黑"/>
+            </a:endParaRPr>
+          </a:p>
+        </p:txBody>
+      </p:sp>
+    </p:spTree>
+  </p:cSld>
+  <p:clrMapOvr>
+    <a:masterClrMapping/>
+  </p:clrMapOvr>
+</p:sld>
+</file>
+
+<file path=ppt/slides/slide2.xml><?xml version="1.0" encoding="utf-8"?>
+<p:sld xmlns:a="http://schemas.openxmlformats.org/drawingml/2006/main" xmlns:r="http://schemas.openxmlformats.org/officeDocument/2006/relationships" xmlns:p="http://schemas.openxmlformats.org/presentationml/2006/main">
+  <p:cSld>
+    <p:spTree>
+      <p:nvGrpSpPr>
+        <p:cNvPr id="1" name=""/>
+        <p:cNvGrpSpPr/>
+        <p:nvPr/>
+      </p:nvGrpSpPr>
+      <p:grpSpPr/>
+      <p:sp>
+        <p:nvSpPr>
+          <p:cNvPr id="2" name="Rectangle 1"/>
+          <p:cNvSpPr/>
+          <p:nvPr/>
+        </p:nvSpPr>
+        <p:spPr>
+          <a:xfrm>
+            <a:off x="0" y="0"/>
+            <a:ext cx="12191695" cy="1097280"/>
+          </a:xfrm>
+          <a:prstGeom prst="rect">
+            <a:avLst/>
+          </a:prstGeom>
+          <a:solidFill>
+            <a:srgbClr val="2563EB"/>
+          </a:solidFill>
+          <a:ln>
+            <a:noFill/>
+          </a:ln>
+        </p:spPr>
+        <p:style>
+          <a:lnRef idx="1">
+            <a:schemeClr val="accent1"/>
+          </a:lnRef>
+          <a:fillRef idx="3">
+            <a:schemeClr val="accent1"/>
+          </a:fillRef>
+          <a:effectRef idx="2">
+            <a:schemeClr val="accent1"/>
+          </a:effectRef>
+          <a:fontRef idx="minor">
+            <a:schemeClr val="lt1"/>
+          </a:fontRef>
+        </p:style>
+        <p:txBody>
+          <a:bodyPr rtlCol="0" anchor="ctr"/>
+          <a:lstStyle/>
+          <a:p>
+            <a:pPr algn="ctr"/>
+          </a:p>
+        </p:txBody>
+      </p:sp>
+      <p:sp>
+        <p:nvSpPr>
+          <p:cNvPr id="3" name="TextBox 2"/>
+          <p:cNvSpPr txBox="1"/>
+          <p:nvPr/>
+        </p:nvSpPr>
+        <p:spPr>
+          <a:xfrm>
+            <a:off x="457200" y="228600"/>
+            <a:ext cx="10972800" cy="731520"/>
+          </a:xfrm>
+          <a:prstGeom prst="rect">
+            <a:avLst/>
+          </a:prstGeom>
+          <a:noFill/>
+        </p:spPr>
+        <p:txBody>
+          <a:bodyPr wrap="none">
+            <a:spAutoFit/>
+          </a:bodyPr>
+          <a:lstStyle/>
+          <a:p>
+            <a:r>
+              <a:rPr sz="3000" b="1">
+                <a:solidFill>
+                  <a:srgbClr val="FFFFFF"/>
+                </a:solidFill>
+                <a:latin typeface="微软雅黑"/>
+              </a:rPr>
+              <a:t>1. 项目速览（30 秒电梯演讲）</a:t>
+            </a:r>
+            <a:endParaRPr sz="3000" b="1">
+              <a:solidFill>
+                <a:srgbClr val="FFFFFF"/>
+              </a:solidFill>
+              <a:latin typeface="微软雅黑"/>
+            </a:endParaRPr>
+          </a:p>
+        </p:txBody>
+      </p:sp>
+      <p:sp>
+        <p:nvSpPr>
+          <p:cNvPr id="4" name="TextBox 3"/>
+          <p:cNvSpPr txBox="1"/>
+          <p:nvPr/>
+        </p:nvSpPr>
+        <p:spPr>
+          <a:xfrm>
+            <a:off x="640080" y="1371600"/>
+            <a:ext cx="10972800" cy="5405755"/>
+          </a:xfrm>
+          <a:prstGeom prst="rect">
+            <a:avLst/>
+          </a:prstGeom>
+          <a:noFill/>
+        </p:spPr>
+        <p:txBody>
+          <a:bodyPr wrap="square">
+            <a:spAutoFit/>
+          </a:bodyPr>
+          <a:lstStyle/>
+          <a:p>
             <a:pPr>
               <a:spcAft>
                 <a:spcPts val="1200"/>
@@ -3780,7 +4102,7 @@
                 </a:solidFill>
                 <a:latin typeface="微软雅黑"/>
               </a:rPr>
-              <a:t>【AI 的角色与能力】</a:t>
+              <a:t>【核心问题】</a:t>
             </a:r>
             <a:endParaRPr sz="2200" b="1">
               <a:solidFill>
@@ -3802,7 +4124,7 @@
                 </a:solidFill>
                 <a:latin typeface="微软雅黑"/>
               </a:rPr>
-              <a:t>• 🧠 意图识别：分析用户搜索词的真实意图（搜配置项/搜参数值/中文别名）</a:t>
+              <a:t>• AOI 设备配置文件繁杂（INI/JSON/XML），工程师查找配置项耗时费力</a:t>
             </a:r>
             <a:endParaRPr sz="2000" b="0">
               <a:solidFill>
@@ -3818,13 +4140,97 @@
               </a:spcAft>
             </a:pPr>
             <a:r>
-              <a:rPr sz="2000" b="0">
+              <a:rPr sz="2000">
                 <a:solidFill>
                   <a:srgbClr val="323232"/>
                 </a:solidFill>
                 <a:latin typeface="微软雅黑"/>
-              </a:rPr>
-              <a:t>• 🔤 同义词扩展：内置 100+ 光学/相机/标定领域同义词映射</a:t>
+                <a:sym typeface="+mn-ea"/>
+              </a:rPr>
+              <a:t>•</a:t>
+            </a:r>
+            <a:r>
+              <a:rPr lang="en-US" sz="2000">
+                <a:solidFill>
+                  <a:srgbClr val="323232"/>
+                </a:solidFill>
+                <a:latin typeface="微软雅黑"/>
+                <a:sym typeface="+mn-ea"/>
+              </a:rPr>
+              <a:t> </a:t>
+            </a:r>
+            <a:r>
+              <a:rPr lang="zh-CN" sz="2000" b="0">
+                <a:solidFill>
+                  <a:srgbClr val="323232"/>
+                </a:solidFill>
+                <a:latin typeface="微软雅黑"/>
+              </a:rPr>
+              <a:t>对配置不熟悉，或者长时间未接触配置文件，可能造成遗忘，导致查找具体字段困难。</a:t>
+            </a:r>
+            <a:endParaRPr lang="zh-CN" sz="2000" b="0">
+              <a:solidFill>
+                <a:srgbClr val="323232"/>
+              </a:solidFill>
+              <a:latin typeface="微软雅黑"/>
+            </a:endParaRPr>
+          </a:p>
+          <a:p>
+            <a:pPr>
+              <a:spcAft>
+                <a:spcPts val="800"/>
+              </a:spcAft>
+            </a:pPr>
+            <a:r>
+              <a:rPr sz="2000">
+                <a:solidFill>
+                  <a:srgbClr val="323232"/>
+                </a:solidFill>
+                <a:latin typeface="微软雅黑"/>
+                <a:sym typeface="+mn-ea"/>
+              </a:rPr>
+              <a:t>•</a:t>
+            </a:r>
+            <a:r>
+              <a:rPr lang="zh-CN" sz="2000" b="1">
+                <a:solidFill>
+                  <a:srgbClr val="323232"/>
+                </a:solidFill>
+                <a:latin typeface="微软雅黑"/>
+              </a:rPr>
+              <a:t> 非开发人员在调试问题时，对配置文件不熟悉，花费大量时间排查后，找到专业人员才定位到配置文件问题，做了无用功</a:t>
+            </a:r>
+            <a:endParaRPr lang="zh-CN" sz="2000" b="1">
+              <a:solidFill>
+                <a:srgbClr val="323232"/>
+              </a:solidFill>
+              <a:latin typeface="微软雅黑"/>
+            </a:endParaRPr>
+          </a:p>
+          <a:p>
+            <a:pPr>
+              <a:spcAft>
+                <a:spcPts val="800"/>
+              </a:spcAft>
+            </a:pPr>
+            <a:r>
+              <a:rPr sz="2000">
+                <a:solidFill>
+                  <a:srgbClr val="323232"/>
+                </a:solidFill>
+                <a:latin typeface="微软雅黑"/>
+                <a:sym typeface="+mn-ea"/>
+              </a:rPr>
+              <a:t>•</a:t>
+            </a:r>
+            <a:r>
+              <a:rPr lang="zh-CN" sz="2000" b="1">
+                <a:solidFill>
+                  <a:srgbClr val="323232"/>
+                </a:solidFill>
+                <a:latin typeface="微软雅黑"/>
+              </a:rPr>
+              <a:t> 配置文件应该受到管控，对于配置文件的修改应当有记录可查，不然可能在某个无人在意的角落有时会偷偷修改配置，导致出现问题后，其他不知情人员排查困难</a:t>
             </a:r>
             <a:endParaRPr sz="2000" b="0">
               <a:solidFill>
@@ -3836,6 +4242,35 @@
           <a:p>
             <a:pPr>
               <a:spcAft>
+                <a:spcPts val="1200"/>
+              </a:spcAft>
+            </a:pPr>
+          </a:p>
+          <a:p>
+            <a:pPr>
+              <a:spcAft>
+                <a:spcPts val="1200"/>
+              </a:spcAft>
+            </a:pPr>
+            <a:r>
+              <a:rPr sz="2200" b="1">
+                <a:solidFill>
+                  <a:srgbClr val="2563EB"/>
+                </a:solidFill>
+                <a:latin typeface="微软雅黑"/>
+              </a:rPr>
+              <a:t>【AI 解决方案】</a:t>
+            </a:r>
+            <a:endParaRPr sz="2200" b="1">
+              <a:solidFill>
+                <a:srgbClr val="2563EB"/>
+              </a:solidFill>
+              <a:latin typeface="微软雅黑"/>
+            </a:endParaRPr>
+          </a:p>
+          <a:p>
+            <a:pPr>
+              <a:spcAft>
                 <a:spcPts val="800"/>
               </a:spcAft>
             </a:pPr>
@@ -3846,7 +4281,25 @@
                 </a:solidFill>
                 <a:latin typeface="微软雅黑"/>
               </a:rPr>
-              <a:t>• 💡 智能建议：实时生成搜索建议，支持用户自定义词典</a:t>
+              <a:t>• 基于意图识别和同义词扩展的智能配置搜索工具，让</a:t>
+            </a:r>
+            <a:r>
+              <a:rPr lang="zh-CN" sz="2000" b="0">
+                <a:solidFill>
+                  <a:srgbClr val="323232"/>
+                </a:solidFill>
+                <a:latin typeface="微软雅黑"/>
+              </a:rPr>
+              <a:t>使用者</a:t>
+            </a:r>
+            <a:r>
+              <a:rPr sz="2000" b="0">
+                <a:solidFill>
+                  <a:srgbClr val="323232"/>
+                </a:solidFill>
+                <a:latin typeface="微软雅黑"/>
+              </a:rPr>
+              <a:t>用自然语言快速定位配置</a:t>
             </a:r>
             <a:endParaRPr sz="2000" b="0">
               <a:solidFill>
@@ -3858,6 +4311,35 @@
           <a:p>
             <a:pPr>
               <a:spcAft>
+                <a:spcPts val="1200"/>
+              </a:spcAft>
+            </a:pPr>
+          </a:p>
+          <a:p>
+            <a:pPr>
+              <a:spcAft>
+                <a:spcPts val="1200"/>
+              </a:spcAft>
+            </a:pPr>
+            <a:r>
+              <a:rPr sz="2200" b="1">
+                <a:solidFill>
+                  <a:srgbClr val="2563EB"/>
+                </a:solidFill>
+                <a:latin typeface="微软雅黑"/>
+              </a:rPr>
+              <a:t>【目标用户/场景】</a:t>
+            </a:r>
+            <a:endParaRPr sz="2200" b="1">
+              <a:solidFill>
+                <a:srgbClr val="2563EB"/>
+              </a:solidFill>
+              <a:latin typeface="微软雅黑"/>
+            </a:endParaRPr>
+          </a:p>
+          <a:p>
+            <a:pPr>
+              <a:spcAft>
                 <a:spcPts val="800"/>
               </a:spcAft>
             </a:pPr>
@@ -3868,7 +4350,7 @@
                 </a:solidFill>
                 <a:latin typeface="微软雅黑"/>
               </a:rPr>
-              <a:t>• 📚 技术栈：Qt/QML + SQLite FTS5 + 规则引擎</a:t>
+              <a:t>• AOI 设备调试工程师、维护人员，需要在数百个配置项中快速定位参数</a:t>
             </a:r>
             <a:endParaRPr sz="2000" b="0">
               <a:solidFill>
@@ -3877,19 +4359,136 @@
               <a:latin typeface="微软雅黑"/>
             </a:endParaRPr>
           </a:p>
+        </p:txBody>
+      </p:sp>
+    </p:spTree>
+  </p:cSld>
+  <p:clrMapOvr>
+    <a:masterClrMapping/>
+  </p:clrMapOvr>
+</p:sld>
+</file>
+
+<file path=ppt/slides/slide3.xml><?xml version="1.0" encoding="utf-8"?>
+<p:sld xmlns:a="http://schemas.openxmlformats.org/drawingml/2006/main" xmlns:r="http://schemas.openxmlformats.org/officeDocument/2006/relationships" xmlns:p="http://schemas.openxmlformats.org/presentationml/2006/main">
+  <p:cSld>
+    <p:spTree>
+      <p:nvGrpSpPr>
+        <p:cNvPr id="1" name=""/>
+        <p:cNvGrpSpPr/>
+        <p:nvPr/>
+      </p:nvGrpSpPr>
+      <p:grpSpPr/>
+      <p:sp>
+        <p:nvSpPr>
+          <p:cNvPr id="2" name="Rectangle 1"/>
+          <p:cNvSpPr/>
+          <p:nvPr/>
+        </p:nvSpPr>
+        <p:spPr>
+          <a:xfrm>
+            <a:off x="0" y="0"/>
+            <a:ext cx="12191695" cy="1097280"/>
+          </a:xfrm>
+          <a:prstGeom prst="rect">
+            <a:avLst/>
+          </a:prstGeom>
+          <a:solidFill>
+            <a:srgbClr val="2563EB"/>
+          </a:solidFill>
+          <a:ln>
+            <a:noFill/>
+          </a:ln>
+        </p:spPr>
+        <p:style>
+          <a:lnRef idx="1">
+            <a:schemeClr val="accent1"/>
+          </a:lnRef>
+          <a:fillRef idx="3">
+            <a:schemeClr val="accent1"/>
+          </a:fillRef>
+          <a:effectRef idx="2">
+            <a:schemeClr val="accent1"/>
+          </a:effectRef>
+          <a:fontRef idx="minor">
+            <a:schemeClr val="lt1"/>
+          </a:fontRef>
+        </p:style>
+        <p:txBody>
+          <a:bodyPr rtlCol="0" anchor="ctr"/>
+          <a:lstStyle/>
+          <a:p>
+            <a:pPr algn="ctr"/>
+          </a:p>
+        </p:txBody>
+      </p:sp>
+      <p:sp>
+        <p:nvSpPr>
+          <p:cNvPr id="3" name="TextBox 2"/>
+          <p:cNvSpPr txBox="1"/>
+          <p:nvPr/>
+        </p:nvSpPr>
+        <p:spPr>
+          <a:xfrm>
+            <a:off x="457200" y="228600"/>
+            <a:ext cx="10972800" cy="731520"/>
+          </a:xfrm>
+          <a:prstGeom prst="rect">
+            <a:avLst/>
+          </a:prstGeom>
+          <a:noFill/>
+        </p:spPr>
+        <p:txBody>
+          <a:bodyPr wrap="none">
+            <a:spAutoFit/>
+          </a:bodyPr>
+          <a:lstStyle/>
+          <a:p>
+            <a:r>
+              <a:rPr sz="3000" b="1">
+                <a:solidFill>
+                  <a:srgbClr val="FFFFFF"/>
+                </a:solidFill>
+                <a:latin typeface="微软雅黑"/>
+              </a:rPr>
+              <a:t>2. AI 如何解决 - 方法与创新</a:t>
+            </a:r>
+            <a:endParaRPr sz="3000" b="1">
+              <a:solidFill>
+                <a:srgbClr val="FFFFFF"/>
+              </a:solidFill>
+              <a:latin typeface="微软雅黑"/>
+            </a:endParaRPr>
+          </a:p>
+        </p:txBody>
+      </p:sp>
+      <p:sp>
+        <p:nvSpPr>
+          <p:cNvPr id="4" name="TextBox 3"/>
+          <p:cNvSpPr txBox="1"/>
+          <p:nvPr/>
+        </p:nvSpPr>
+        <p:spPr>
+          <a:xfrm>
+            <a:off x="640080" y="1371600"/>
+            <a:ext cx="10972800" cy="4687570"/>
+          </a:xfrm>
+          <a:prstGeom prst="rect">
+            <a:avLst/>
+          </a:prstGeom>
+          <a:noFill/>
+        </p:spPr>
+        <p:txBody>
+          <a:bodyPr wrap="square">
+            <a:spAutoFit/>
+          </a:bodyPr>
+          <a:lstStyle/>
           <a:p>
             <a:pPr>
               <a:spcAft>
                 <a:spcPts val="1200"/>
               </a:spcAft>
             </a:pPr>
-          </a:p>
-          <a:p>
-            <a:pPr>
-              <a:spcAft>
-                <a:spcPts val="1200"/>
-              </a:spcAft>
-            </a:pPr>
             <a:r>
               <a:rPr sz="2200" b="1">
                 <a:solidFill>
@@ -3897,7 +4496,7 @@
                 </a:solidFill>
                 <a:latin typeface="微软雅黑"/>
               </a:rPr>
-              <a:t>【AI 解题流程】</a:t>
+              <a:t>【AI 的角色与能力】</a:t>
             </a:r>
             <a:endParaRPr sz="2200" b="1">
               <a:solidFill>
@@ -3919,7 +4518,7 @@
                 </a:solidFill>
                 <a:latin typeface="微软雅黑"/>
               </a:rPr>
-              <a:t>• 用户输入 → 意图分析 → 同义词扩展 → 数据库检索 → 排序展示</a:t>
+              <a:t>• 🧠 意图识别：分析用户搜索词的真实意图（搜配置项/搜参数值/中文别名）</a:t>
             </a:r>
             <a:endParaRPr sz="2000" b="0">
               <a:solidFill>
@@ -3941,9 +4540,179 @@
                 </a:solidFill>
                 <a:latin typeface="微软雅黑"/>
               </a:rPr>
+              <a:t>• 🔤 同义词扩展：内置 100+ 光学/相机/标定领域同义词映射</a:t>
+            </a:r>
+            <a:endParaRPr sz="2000" b="0">
+              <a:solidFill>
+                <a:srgbClr val="323232"/>
+              </a:solidFill>
+              <a:latin typeface="微软雅黑"/>
+            </a:endParaRPr>
+          </a:p>
+          <a:p>
+            <a:pPr>
+              <a:spcAft>
+                <a:spcPts val="800"/>
+              </a:spcAft>
+            </a:pPr>
+            <a:r>
+              <a:rPr sz="2000" b="0">
+                <a:solidFill>
+                  <a:srgbClr val="323232"/>
+                </a:solidFill>
+                <a:latin typeface="微软雅黑"/>
+              </a:rPr>
+              <a:t>• 💡 智能建议：实时生成搜索建议，支持用户自定义词典</a:t>
+            </a:r>
+            <a:endParaRPr sz="2000" b="0">
+              <a:solidFill>
+                <a:srgbClr val="323232"/>
+              </a:solidFill>
+              <a:latin typeface="微软雅黑"/>
+            </a:endParaRPr>
+          </a:p>
+          <a:p>
+            <a:pPr>
+              <a:spcAft>
+                <a:spcPts val="800"/>
+              </a:spcAft>
+            </a:pPr>
+            <a:r>
+              <a:rPr sz="2000" b="0">
+                <a:solidFill>
+                  <a:srgbClr val="323232"/>
+                </a:solidFill>
+                <a:latin typeface="微软雅黑"/>
+              </a:rPr>
+              <a:t>• 📚 技术栈：Qt/QML + SQLite FTS5 + 规则引擎</a:t>
+            </a:r>
+            <a:endParaRPr sz="2000" b="0">
+              <a:solidFill>
+                <a:srgbClr val="323232"/>
+              </a:solidFill>
+              <a:latin typeface="微软雅黑"/>
+            </a:endParaRPr>
+          </a:p>
+          <a:p>
+            <a:pPr>
+              <a:spcAft>
+                <a:spcPts val="1200"/>
+              </a:spcAft>
+            </a:pPr>
+          </a:p>
+          <a:p>
+            <a:pPr>
+              <a:spcAft>
+                <a:spcPts val="1200"/>
+              </a:spcAft>
+            </a:pPr>
+            <a:r>
+              <a:rPr sz="2200" b="1">
+                <a:solidFill>
+                  <a:srgbClr val="2563EB"/>
+                </a:solidFill>
+                <a:latin typeface="微软雅黑"/>
+              </a:rPr>
+              <a:t>【AI 解题流程】</a:t>
+            </a:r>
+            <a:endParaRPr sz="2200" b="1">
+              <a:solidFill>
+                <a:srgbClr val="2563EB"/>
+              </a:solidFill>
+              <a:latin typeface="微软雅黑"/>
+            </a:endParaRPr>
+          </a:p>
+          <a:p>
+            <a:pPr>
+              <a:spcAft>
+                <a:spcPts val="800"/>
+              </a:spcAft>
+            </a:pPr>
+            <a:r>
+              <a:rPr sz="2000" b="0">
+                <a:solidFill>
+                  <a:srgbClr val="323232"/>
+                </a:solidFill>
+                <a:latin typeface="微软雅黑"/>
+              </a:rPr>
+              <a:t>• 用户输入 → 意图分析 → 同义词扩展 → 数据库检索 → 排序展示</a:t>
+            </a:r>
+            <a:endParaRPr sz="2000" b="0">
+              <a:solidFill>
+                <a:srgbClr val="323232"/>
+              </a:solidFill>
+              <a:latin typeface="微软雅黑"/>
+            </a:endParaRPr>
+          </a:p>
+          <a:p>
+            <a:pPr>
+              <a:spcAft>
+                <a:spcPts val="800"/>
+              </a:spcAft>
+            </a:pPr>
+            <a:r>
+              <a:rPr sz="2000" b="0">
+                <a:solidFill>
+                  <a:srgbClr val="323232"/>
+                </a:solidFill>
+                <a:latin typeface="微软雅黑"/>
+              </a:rPr>
               <a:t>• 示例：输入"曝光"→ 识别为搜配置项 → 扩展 [exposure, 曝光时间，积分时间] → 检索</a:t>
             </a:r>
             <a:endParaRPr sz="2000" b="0">
+              <a:solidFill>
+                <a:srgbClr val="323232"/>
+              </a:solidFill>
+              <a:latin typeface="微软雅黑"/>
+            </a:endParaRPr>
+          </a:p>
+          <a:p>
+            <a:pPr>
+              <a:spcAft>
+                <a:spcPts val="800"/>
+              </a:spcAft>
+            </a:pPr>
+            <a:endParaRPr sz="2000" b="0">
+              <a:solidFill>
+                <a:srgbClr val="323232"/>
+              </a:solidFill>
+              <a:latin typeface="微软雅黑"/>
+            </a:endParaRPr>
+          </a:p>
+          <a:p>
+            <a:pPr>
+              <a:spcAft>
+                <a:spcPts val="800"/>
+              </a:spcAft>
+            </a:pPr>
+            <a:r>
+              <a:rPr lang="zh-CN" sz="2000" b="0">
+                <a:solidFill>
+                  <a:srgbClr val="323232"/>
+                </a:solidFill>
+                <a:latin typeface="微软雅黑"/>
+              </a:rPr>
+              <a:t>其他内容：基于聚类将相同领域的字段分簇，提供联想功能，通过</a:t>
+            </a:r>
+            <a:r>
+              <a:rPr lang="en-US" altLang="zh-CN" sz="2000" b="0">
+                <a:solidFill>
+                  <a:srgbClr val="323232"/>
+                </a:solidFill>
+                <a:latin typeface="微软雅黑"/>
+              </a:rPr>
+              <a:t>ctrl+r</a:t>
+            </a:r>
+            <a:r>
+              <a:rPr lang="zh-CN" altLang="en-US" sz="2000" b="0">
+                <a:solidFill>
+                  <a:srgbClr val="323232"/>
+                </a:solidFill>
+                <a:latin typeface="微软雅黑"/>
+              </a:rPr>
+              <a:t>唤醒</a:t>
+            </a:r>
+            <a:endParaRPr lang="zh-CN" altLang="en-US" sz="2000" b="0">
               <a:solidFill>
                 <a:srgbClr val="323232"/>
               </a:solidFill>
@@ -4409,7 +5178,7 @@
         <p:spPr>
           <a:xfrm>
             <a:off x="640080" y="3840480"/>
-            <a:ext cx="10972800" cy="2560320"/>
+            <a:ext cx="10972800" cy="1511935"/>
           </a:xfrm>
           <a:prstGeom prst="rect">
             <a:avLst/>
@@ -4495,7 +5264,25 @@
                 </a:solidFill>
                 <a:latin typeface="微软雅黑"/>
               </a:rPr>
-              <a:t>✓ 精简模式（Spotlight 风格）+ 全局快捷键 Ctrl+Alt+M，随叫随到</a:t>
+              <a:t>✓ 精简模式</a:t>
+            </a:r>
+            <a:r>
+              <a:rPr lang="en-US" sz="1900" b="0">
+                <a:solidFill>
+                  <a:srgbClr val="323232"/>
+                </a:solidFill>
+                <a:latin typeface="微软雅黑"/>
+              </a:rPr>
+              <a:t> </a:t>
+            </a:r>
+            <a:r>
+              <a:rPr sz="1900" b="0">
+                <a:solidFill>
+                  <a:srgbClr val="323232"/>
+                </a:solidFill>
+                <a:latin typeface="微软雅黑"/>
+              </a:rPr>
+              <a:t>+ 全局快捷键 Ctrl+Alt+M，随叫随到</a:t>
             </a:r>
             <a:endParaRPr sz="1900" b="0">
               <a:solidFill>
@@ -4616,7 +5403,7 @@
         <p:spPr>
           <a:xfrm>
             <a:off x="640080" y="1371600"/>
-            <a:ext cx="10972800" cy="5029200"/>
+            <a:ext cx="10972800" cy="4276725"/>
           </a:xfrm>
           <a:prstGeom prst="rect">
             <a:avLst/>
@@ -4685,7 +5472,38 @@
                 </a:solidFill>
                 <a:latin typeface="微软雅黑"/>
               </a:rPr>
-              <a:t>• 🛠 GitHub 仓库：[待补充]</a:t>
+              <a:t>• 🛠 GitHub 仓库：</a:t>
+            </a:r>
+            <a:r>
+              <a:rPr lang="en-US" altLang="zh-CN" sz="2000" b="0">
+                <a:solidFill>
+                  <a:srgbClr val="323232"/>
+                </a:solidFill>
+                <a:latin typeface="微软雅黑"/>
+              </a:rPr>
+              <a:t>https://github.com/1zyp9999/configWatcher</a:t>
+            </a:r>
+            <a:endParaRPr lang="en-US" altLang="zh-CN" sz="2000" b="0">
+              <a:solidFill>
+                <a:srgbClr val="323232"/>
+              </a:solidFill>
+              <a:latin typeface="微软雅黑"/>
+            </a:endParaRPr>
+          </a:p>
+          <a:p>
+            <a:pPr>
+              <a:spcAft>
+                <a:spcPts val="800"/>
+              </a:spcAft>
+            </a:pPr>
+            <a:r>
+              <a:rPr sz="2000" b="0">
+                <a:solidFill>
+                  <a:srgbClr val="323232"/>
+                </a:solidFill>
+                <a:latin typeface="微软雅黑"/>
+              </a:rPr>
+              <a:t>• 📱 支持格式：INI / JSON / XML 配置文件</a:t>
             </a:r>
             <a:endParaRPr sz="2000" b="0">
               <a:solidFill>
@@ -4697,6 +5515,35 @@
           <a:p>
             <a:pPr>
               <a:spcAft>
+                <a:spcPts val="1200"/>
+              </a:spcAft>
+            </a:pPr>
+          </a:p>
+          <a:p>
+            <a:pPr>
+              <a:spcAft>
+                <a:spcPts val="1200"/>
+              </a:spcAft>
+            </a:pPr>
+            <a:r>
+              <a:rPr sz="2200" b="1">
+                <a:solidFill>
+                  <a:srgbClr val="2563EB"/>
+                </a:solidFill>
+                <a:latin typeface="微软雅黑"/>
+              </a:rPr>
+              <a:t>【关键效果展示】</a:t>
+            </a:r>
+            <a:endParaRPr sz="2200" b="1">
+              <a:solidFill>
+                <a:srgbClr val="2563EB"/>
+              </a:solidFill>
+              <a:latin typeface="微软雅黑"/>
+            </a:endParaRPr>
+          </a:p>
+          <a:p>
+            <a:pPr>
+              <a:spcAft>
                 <a:spcPts val="800"/>
               </a:spcAft>
             </a:pPr>
@@ -4707,7 +5554,7 @@
                 </a:solidFill>
                 <a:latin typeface="微软雅黑"/>
               </a:rPr>
-              <a:t>• 📱 支持格式：INI / JSON / XML 配置文件</a:t>
+              <a:t>• • 意图识别 5 种类型：search_key / search_value / search_chinese / navigate / unknown</a:t>
             </a:r>
             <a:endParaRPr sz="2000" b="0">
               <a:solidFill>
@@ -4719,35 +5566,6 @@
           <a:p>
             <a:pPr>
               <a:spcAft>
-                <a:spcPts val="1200"/>
-              </a:spcAft>
-            </a:pPr>
-          </a:p>
-          <a:p>
-            <a:pPr>
-              <a:spcAft>
-                <a:spcPts val="1200"/>
-              </a:spcAft>
-            </a:pPr>
-            <a:r>
-              <a:rPr sz="2200" b="1">
-                <a:solidFill>
-                  <a:srgbClr val="2563EB"/>
-                </a:solidFill>
-                <a:latin typeface="微软雅黑"/>
-              </a:rPr>
-              <a:t>【关键效果展示】</a:t>
-            </a:r>
-            <a:endParaRPr sz="2200" b="1">
-              <a:solidFill>
-                <a:srgbClr val="2563EB"/>
-              </a:solidFill>
-              <a:latin typeface="微软雅黑"/>
-            </a:endParaRPr>
-          </a:p>
-          <a:p>
-            <a:pPr>
-              <a:spcAft>
                 <a:spcPts val="800"/>
               </a:spcAft>
             </a:pPr>
@@ -4758,7 +5576,7 @@
                 </a:solidFill>
                 <a:latin typeface="微软雅黑"/>
               </a:rPr>
-              <a:t>• • 意图识别 5 种类型：search_key / search_value / search_chinese / navigate / unknown</a:t>
+              <a:t>• • 置信度可视化：实时显示 AI 分析置信度（0-100%）</a:t>
             </a:r>
             <a:endParaRPr sz="2000" b="0">
               <a:solidFill>
@@ -4780,7 +5598,7 @@
                 </a:solidFill>
                 <a:latin typeface="微软雅黑"/>
               </a:rPr>
-              <a:t>• • 置信度可视化：实时显示 AI 分析置信度（0-100%）</a:t>
+              <a:t>• • 搜索历史学习：记录高频搜索，智能调整建议权重</a:t>
             </a:r>
             <a:endParaRPr sz="2000" b="0">
               <a:solidFill>
@@ -4795,15 +5613,6 @@
                 <a:spcPts val="800"/>
               </a:spcAft>
             </a:pPr>
-            <a:r>
-              <a:rPr sz="2000" b="0">
-                <a:solidFill>
-                  <a:srgbClr val="323232"/>
-                </a:solidFill>
-                <a:latin typeface="微软雅黑"/>
-              </a:rPr>
-              <a:t>• • 搜索历史学习：记录高频搜索，智能调整建议权重</a:t>
-            </a:r>
             <a:endParaRPr sz="2000" b="0">
               <a:solidFill>
                 <a:srgbClr val="323232"/>
@@ -4903,7 +5712,7 @@
                 </a:solidFill>
                 <a:latin typeface="微软雅黑"/>
               </a:rPr>
-              <a:t>5. 总结与迭代</a:t>
+              <a:t>4. 成果验证</a:t>
             </a:r>
             <a:endParaRPr sz="3000" b="1">
               <a:solidFill>
@@ -4914,16 +5723,40 @@
           </a:p>
         </p:txBody>
       </p:sp>
-      <p:sp>
-        <p:nvSpPr>
-          <p:cNvPr id="4" name="TextBox 3"/>
+      <p:pic>
+        <p:nvPicPr>
+          <p:cNvPr id="5" name="图片 4"/>
+          <p:cNvPicPr>
+            <a:picLocks noChangeAspect="1"/>
+          </p:cNvPicPr>
+          <p:nvPr/>
+        </p:nvPicPr>
+        <p:blipFill>
+          <a:blip r:embed="rId1"/>
+          <a:stretch>
+            <a:fillRect/>
+          </a:stretch>
+        </p:blipFill>
+        <p:spPr>
+          <a:xfrm>
+            <a:off x="1014095" y="1176655"/>
+            <a:ext cx="8609330" cy="5429885"/>
+          </a:xfrm>
+          <a:prstGeom prst="rect">
+            <a:avLst/>
+          </a:prstGeom>
+        </p:spPr>
+      </p:pic>
+      <p:sp>
+        <p:nvSpPr>
+          <p:cNvPr id="6" name="文本框 5"/>
           <p:cNvSpPr txBox="1"/>
           <p:nvPr/>
         </p:nvSpPr>
         <p:spPr>
           <a:xfrm>
-            <a:off x="457200" y="1371600"/>
-            <a:ext cx="5486400" cy="5029200"/>
+            <a:off x="9831070" y="1375410"/>
+            <a:ext cx="4064000" cy="368300"/>
           </a:xfrm>
           <a:prstGeom prst="rect">
             <a:avLst/>
@@ -4931,264 +5764,19 @@
           <a:noFill/>
         </p:spPr>
         <p:txBody>
-          <a:bodyPr wrap="square">
+          <a:bodyPr wrap="square" rtlCol="0">
             <a:spAutoFit/>
           </a:bodyPr>
-          <a:lstStyle/>
-          <a:p>
-            <a:r>
-              <a:rPr sz="2400" b="1">
-                <a:solidFill>
-                  <a:srgbClr val="2563EB"/>
-                </a:solidFill>
-                <a:latin typeface="微软雅黑"/>
-              </a:rPr>
-              <a:t>【已实现功能】</a:t>
-            </a:r>
-            <a:endParaRPr sz="2400" b="1">
-              <a:solidFill>
-                <a:srgbClr val="2563EB"/>
-              </a:solidFill>
-              <a:latin typeface="微软雅黑"/>
-            </a:endParaRPr>
-          </a:p>
-          <a:p>
-            <a:pPr>
-              <a:spcAft>
-                <a:spcPts val="1000"/>
-              </a:spcAft>
-            </a:pPr>
-            <a:r>
-              <a:rPr sz="1900" b="0">
-                <a:solidFill>
-                  <a:srgbClr val="323232"/>
-                </a:solidFill>
-                <a:latin typeface="微软雅黑"/>
-              </a:rPr>
-              <a:t>✓ 意图识别引擎：5 种意图类型 + 置信度评估</a:t>
-            </a:r>
-            <a:endParaRPr sz="1900" b="0">
-              <a:solidFill>
-                <a:srgbClr val="323232"/>
-              </a:solidFill>
-              <a:latin typeface="微软雅黑"/>
-            </a:endParaRPr>
-          </a:p>
-          <a:p>
-            <a:pPr>
-              <a:spcAft>
-                <a:spcPts val="1000"/>
-              </a:spcAft>
-            </a:pPr>
-            <a:r>
-              <a:rPr sz="1900" b="0">
-                <a:solidFill>
-                  <a:srgbClr val="323232"/>
-                </a:solidFill>
-                <a:latin typeface="微软雅黑"/>
-              </a:rPr>
-              <a:t>✓ 同义词词典：100+ 领域术语映射（相机/光学/标定/3D）</a:t>
-            </a:r>
-            <a:endParaRPr sz="1900" b="0">
-              <a:solidFill>
-                <a:srgbClr val="323232"/>
-              </a:solidFill>
-              <a:latin typeface="微软雅黑"/>
-            </a:endParaRPr>
-          </a:p>
-          <a:p>
-            <a:pPr>
-              <a:spcAft>
-                <a:spcPts val="1000"/>
-              </a:spcAft>
-            </a:pPr>
-            <a:r>
-              <a:rPr sz="1900" b="0">
-                <a:solidFill>
-                  <a:srgbClr val="323232"/>
-                </a:solidFill>
-                <a:latin typeface="微软雅黑"/>
-              </a:rPr>
-              <a:t>✓ 双模式 UI：完整模式 + 精简模式（全局快捷键切换）</a:t>
-            </a:r>
-            <a:endParaRPr sz="1900" b="0">
-              <a:solidFill>
-                <a:srgbClr val="323232"/>
-              </a:solidFill>
-              <a:latin typeface="微软雅黑"/>
-            </a:endParaRPr>
-          </a:p>
-          <a:p>
-            <a:pPr>
-              <a:spcAft>
-                <a:spcPts val="1000"/>
-              </a:spcAft>
-            </a:pPr>
-            <a:r>
-              <a:rPr sz="1900" b="0">
-                <a:solidFill>
-                  <a:srgbClr val="323232"/>
-                </a:solidFill>
-                <a:latin typeface="微软雅黑"/>
-              </a:rPr>
-              <a:t>✓ 多格式支持：INI / JSON / XML 配置文件解析</a:t>
-            </a:r>
-            <a:endParaRPr sz="1900" b="0">
-              <a:solidFill>
-                <a:srgbClr val="323232"/>
-              </a:solidFill>
-              <a:latin typeface="微软雅黑"/>
-            </a:endParaRPr>
-          </a:p>
-          <a:p>
-            <a:pPr>
-              <a:spcAft>
-                <a:spcPts val="1000"/>
-              </a:spcAft>
-            </a:pPr>
-            <a:r>
-              <a:rPr sz="1900" b="0">
-                <a:solidFill>
-                  <a:srgbClr val="323232"/>
-                </a:solidFill>
-                <a:latin typeface="微软雅黑"/>
-              </a:rPr>
-              <a:t>✓ 用户词典：支持自定义术语和搜索历史学习</a:t>
-            </a:r>
-            <a:endParaRPr sz="1900" b="0">
-              <a:solidFill>
-                <a:srgbClr val="323232"/>
-              </a:solidFill>
-              <a:latin typeface="微软雅黑"/>
-            </a:endParaRPr>
-          </a:p>
-        </p:txBody>
-      </p:sp>
-      <p:sp>
-        <p:nvSpPr>
-          <p:cNvPr id="5" name="TextBox 4"/>
-          <p:cNvSpPr txBox="1"/>
-          <p:nvPr/>
-        </p:nvSpPr>
-        <p:spPr>
-          <a:xfrm>
-            <a:off x="6400800" y="1371600"/>
-            <a:ext cx="5486400" cy="5029200"/>
-          </a:xfrm>
-          <a:prstGeom prst="rect">
-            <a:avLst/>
-          </a:prstGeom>
-          <a:noFill/>
-        </p:spPr>
-        <p:txBody>
-          <a:bodyPr wrap="square">
-            <a:spAutoFit/>
-          </a:bodyPr>
-          <a:lstStyle/>
-          <a:p>
-            <a:r>
-              <a:rPr sz="2400" b="1">
-                <a:solidFill>
-                  <a:srgbClr val="2563EB"/>
-                </a:solidFill>
-                <a:latin typeface="微软雅黑"/>
-              </a:rPr>
-              <a:t>【迭代计划 🚀】</a:t>
-            </a:r>
-            <a:endParaRPr sz="2400" b="1">
-              <a:solidFill>
-                <a:srgbClr val="2563EB"/>
-              </a:solidFill>
-              <a:latin typeface="微软雅黑"/>
-            </a:endParaRPr>
-          </a:p>
-          <a:p>
-            <a:pPr>
-              <a:spcAft>
-                <a:spcPts val="1000"/>
-              </a:spcAft>
-            </a:pPr>
-            <a:r>
-              <a:rPr sz="1900" b="0">
-                <a:solidFill>
-                  <a:srgbClr val="323232"/>
-                </a:solidFill>
-                <a:latin typeface="微软雅黑"/>
-              </a:rPr>
-              <a:t>► 接入 LLM 大模型，实现更强大的自然语言理解</a:t>
-            </a:r>
-            <a:endParaRPr sz="1900" b="0">
-              <a:solidFill>
-                <a:srgbClr val="323232"/>
-              </a:solidFill>
-              <a:latin typeface="微软雅黑"/>
-            </a:endParaRPr>
-          </a:p>
-          <a:p>
-            <a:pPr>
-              <a:spcAft>
-                <a:spcPts val="1000"/>
-              </a:spcAft>
-            </a:pPr>
-            <a:r>
-              <a:rPr sz="1900" b="0">
-                <a:solidFill>
-                  <a:srgbClr val="323232"/>
-                </a:solidFill>
-                <a:latin typeface="微软雅黑"/>
-              </a:rPr>
-              <a:t>► 支持配置项智能推荐和异常检测</a:t>
-            </a:r>
-            <a:endParaRPr sz="1900" b="0">
-              <a:solidFill>
-                <a:srgbClr val="323232"/>
-              </a:solidFill>
-              <a:latin typeface="微软雅黑"/>
-            </a:endParaRPr>
-          </a:p>
-          <a:p>
-            <a:pPr>
-              <a:spcAft>
-                <a:spcPts val="1000"/>
-              </a:spcAft>
-            </a:pPr>
-            <a:r>
-              <a:rPr sz="1900" b="0">
-                <a:solidFill>
-                  <a:srgbClr val="323232"/>
-                </a:solidFill>
-                <a:latin typeface="微软雅黑"/>
-              </a:rPr>
-              <a:t>► 增加配置变更影响分析功能</a:t>
-            </a:r>
-            <a:endParaRPr sz="1900" b="0">
-              <a:solidFill>
-                <a:srgbClr val="323232"/>
-              </a:solidFill>
-              <a:latin typeface="微软雅黑"/>
-            </a:endParaRPr>
-          </a:p>
-          <a:p>
-            <a:pPr>
-              <a:spcAft>
-                <a:spcPts val="1000"/>
-              </a:spcAft>
-            </a:pPr>
-            <a:r>
-              <a:rPr sz="1900" b="0">
-                <a:solidFill>
-                  <a:srgbClr val="323232"/>
-                </a:solidFill>
-                <a:latin typeface="微软雅黑"/>
-              </a:rPr>
-              <a:t>► 扩展更多工业领域词典（PLC/机器人/传感器）</a:t>
-            </a:r>
-            <a:endParaRPr sz="1900" b="0">
-              <a:solidFill>
-                <a:srgbClr val="323232"/>
-              </a:solidFill>
-              <a:latin typeface="微软雅黑"/>
-            </a:endParaRPr>
+          <a:p>
+            <a:r>
+              <a:rPr lang="en-US" altLang="zh-CN"/>
+              <a:t>ai</a:t>
+            </a:r>
+            <a:r>
+              <a:rPr lang="zh-CN" altLang="en-US"/>
+              <a:t>置信度增强搜索</a:t>
+            </a:r>
+            <a:endParaRPr lang="zh-CN" altLang="en-US"/>
           </a:p>
         </p:txBody>
       </p:sp>
@@ -5219,7 +5807,7 @@
         <p:spPr>
           <a:xfrm>
             <a:off x="0" y="0"/>
-            <a:ext cx="12191695" cy="6858000"/>
+            <a:ext cx="12191695" cy="1097280"/>
           </a:xfrm>
           <a:prstGeom prst="rect">
             <a:avLst/>
@@ -5261,8 +5849,8 @@
         </p:nvSpPr>
         <p:spPr>
           <a:xfrm>
-            <a:off x="457200" y="1828800"/>
-            <a:ext cx="10972800" cy="1828800"/>
+            <a:off x="457200" y="228600"/>
+            <a:ext cx="10972800" cy="731520"/>
           </a:xfrm>
           <a:prstGeom prst="rect">
             <a:avLst/>
@@ -5275,40 +5863,445 @@
           </a:bodyPr>
           <a:lstStyle/>
           <a:p>
-            <a:pPr algn="ctr"/>
-            <a:r>
-              <a:rPr sz="4800" b="1">
+            <a:r>
+              <a:rPr sz="3000" b="1">
                 <a:solidFill>
                   <a:srgbClr val="FFFFFF"/>
                 </a:solidFill>
                 <a:latin typeface="微软雅黑"/>
               </a:rPr>
-              <a:t>感谢聆听！</a:t>
-            </a:r>
-            <a:endParaRPr sz="4800" b="1">
+              <a:t>4. 成果验证</a:t>
+            </a:r>
+            <a:endParaRPr sz="3000" b="1">
               <a:solidFill>
                 <a:srgbClr val="FFFFFF"/>
               </a:solidFill>
               <a:latin typeface="微软雅黑"/>
             </a:endParaRPr>
           </a:p>
+        </p:txBody>
+      </p:sp>
+      <p:pic>
+        <p:nvPicPr>
+          <p:cNvPr id="4" name="图片 3"/>
+          <p:cNvPicPr>
+            <a:picLocks noChangeAspect="1"/>
+          </p:cNvPicPr>
+          <p:nvPr/>
+        </p:nvPicPr>
+        <p:blipFill>
+          <a:blip r:embed="rId1"/>
+          <a:stretch>
+            <a:fillRect/>
+          </a:stretch>
+        </p:blipFill>
+        <p:spPr>
+          <a:xfrm>
+            <a:off x="1912620" y="1390650"/>
+            <a:ext cx="8062595" cy="5085080"/>
+          </a:xfrm>
+          <a:prstGeom prst="rect">
+            <a:avLst/>
+          </a:prstGeom>
+        </p:spPr>
+      </p:pic>
+      <p:sp>
+        <p:nvSpPr>
+          <p:cNvPr id="6" name="文本框 5"/>
+          <p:cNvSpPr txBox="1"/>
+          <p:nvPr/>
+        </p:nvSpPr>
+        <p:spPr>
+          <a:xfrm>
+            <a:off x="10212070" y="1522730"/>
+            <a:ext cx="4064000" cy="368300"/>
+          </a:xfrm>
+          <a:prstGeom prst="rect">
+            <a:avLst/>
+          </a:prstGeom>
+          <a:noFill/>
+        </p:spPr>
+        <p:txBody>
+          <a:bodyPr wrap="square" rtlCol="0">
+            <a:spAutoFit/>
+          </a:bodyPr>
+          <a:p>
+            <a:r>
+              <a:rPr lang="zh-CN" altLang="en-US"/>
+              <a:t>搜索历史可视化</a:t>
+            </a:r>
+            <a:endParaRPr lang="zh-CN" altLang="en-US"/>
+          </a:p>
+        </p:txBody>
+      </p:sp>
+    </p:spTree>
+  </p:cSld>
+  <p:clrMapOvr>
+    <a:masterClrMapping/>
+  </p:clrMapOvr>
+</p:sld>
+</file>
+
+<file path=ppt/slides/slide8.xml><?xml version="1.0" encoding="utf-8"?>
+<p:sld xmlns:a="http://schemas.openxmlformats.org/drawingml/2006/main" xmlns:r="http://schemas.openxmlformats.org/officeDocument/2006/relationships" xmlns:p="http://schemas.openxmlformats.org/presentationml/2006/main">
+  <p:cSld>
+    <p:spTree>
+      <p:nvGrpSpPr>
+        <p:cNvPr id="1" name=""/>
+        <p:cNvGrpSpPr/>
+        <p:nvPr/>
+      </p:nvGrpSpPr>
+      <p:grpSpPr/>
+      <p:sp>
+        <p:nvSpPr>
+          <p:cNvPr id="2" name="Rectangle 1"/>
+          <p:cNvSpPr/>
+          <p:nvPr/>
+        </p:nvSpPr>
+        <p:spPr>
+          <a:xfrm>
+            <a:off x="0" y="0"/>
+            <a:ext cx="12191695" cy="1097280"/>
+          </a:xfrm>
+          <a:prstGeom prst="rect">
+            <a:avLst/>
+          </a:prstGeom>
+          <a:solidFill>
+            <a:srgbClr val="2563EB"/>
+          </a:solidFill>
+          <a:ln>
+            <a:noFill/>
+          </a:ln>
+        </p:spPr>
+        <p:style>
+          <a:lnRef idx="1">
+            <a:schemeClr val="accent1"/>
+          </a:lnRef>
+          <a:fillRef idx="3">
+            <a:schemeClr val="accent1"/>
+          </a:fillRef>
+          <a:effectRef idx="2">
+            <a:schemeClr val="accent1"/>
+          </a:effectRef>
+          <a:fontRef idx="minor">
+            <a:schemeClr val="lt1"/>
+          </a:fontRef>
+        </p:style>
+        <p:txBody>
+          <a:bodyPr rtlCol="0" anchor="ctr"/>
+          <a:lstStyle/>
           <a:p>
             <a:pPr algn="ctr"/>
-            <a:r>
-              <a:rPr sz="3600" b="0">
+          </a:p>
+        </p:txBody>
+      </p:sp>
+      <p:sp>
+        <p:nvSpPr>
+          <p:cNvPr id="3" name="TextBox 2"/>
+          <p:cNvSpPr txBox="1"/>
+          <p:nvPr/>
+        </p:nvSpPr>
+        <p:spPr>
+          <a:xfrm>
+            <a:off x="457200" y="228600"/>
+            <a:ext cx="10972800" cy="731520"/>
+          </a:xfrm>
+          <a:prstGeom prst="rect">
+            <a:avLst/>
+          </a:prstGeom>
+          <a:noFill/>
+        </p:spPr>
+        <p:txBody>
+          <a:bodyPr wrap="none">
+            <a:spAutoFit/>
+          </a:bodyPr>
+          <a:lstStyle/>
+          <a:p>
+            <a:r>
+              <a:rPr sz="3000" b="1">
                 <a:solidFill>
                   <a:srgbClr val="FFFFFF"/>
                 </a:solidFill>
                 <a:latin typeface="微软雅黑"/>
               </a:rPr>
-              <a:t>Q &amp; A</a:t>
-            </a:r>
-            <a:endParaRPr sz="3600" b="0">
+              <a:t>4. 成果验证</a:t>
+            </a:r>
+            <a:endParaRPr sz="3000" b="1">
               <a:solidFill>
                 <a:srgbClr val="FFFFFF"/>
               </a:solidFill>
               <a:latin typeface="微软雅黑"/>
             </a:endParaRPr>
+          </a:p>
+        </p:txBody>
+      </p:sp>
+      <p:sp>
+        <p:nvSpPr>
+          <p:cNvPr id="6" name="文本框 5"/>
+          <p:cNvSpPr txBox="1"/>
+          <p:nvPr/>
+        </p:nvSpPr>
+        <p:spPr>
+          <a:xfrm>
+            <a:off x="9257665" y="1597660"/>
+            <a:ext cx="4064000" cy="368300"/>
+          </a:xfrm>
+          <a:prstGeom prst="rect">
+            <a:avLst/>
+          </a:prstGeom>
+          <a:noFill/>
+        </p:spPr>
+        <p:txBody>
+          <a:bodyPr wrap="square" rtlCol="0">
+            <a:spAutoFit/>
+          </a:bodyPr>
+          <a:p>
+            <a:r>
+              <a:rPr lang="zh-CN" altLang="en-US"/>
+              <a:t>联想功能</a:t>
+            </a:r>
+            <a:endParaRPr lang="zh-CN" altLang="en-US"/>
+          </a:p>
+        </p:txBody>
+      </p:sp>
+      <p:pic>
+        <p:nvPicPr>
+          <p:cNvPr id="5" name="图片 4"/>
+          <p:cNvPicPr>
+            <a:picLocks noChangeAspect="1"/>
+          </p:cNvPicPr>
+          <p:nvPr/>
+        </p:nvPicPr>
+        <p:blipFill>
+          <a:blip r:embed="rId1"/>
+          <a:stretch>
+            <a:fillRect/>
+          </a:stretch>
+        </p:blipFill>
+        <p:spPr>
+          <a:xfrm>
+            <a:off x="936625" y="1597660"/>
+            <a:ext cx="7706360" cy="4860925"/>
+          </a:xfrm>
+          <a:prstGeom prst="rect">
+            <a:avLst/>
+          </a:prstGeom>
+        </p:spPr>
+      </p:pic>
+    </p:spTree>
+  </p:cSld>
+  <p:clrMapOvr>
+    <a:masterClrMapping/>
+  </p:clrMapOvr>
+</p:sld>
+</file>
+
+<file path=ppt/slides/slide9.xml><?xml version="1.0" encoding="utf-8"?>
+<p:sld xmlns:a="http://schemas.openxmlformats.org/drawingml/2006/main" xmlns:r="http://schemas.openxmlformats.org/officeDocument/2006/relationships" xmlns:p="http://schemas.openxmlformats.org/presentationml/2006/main">
+  <p:cSld>
+    <p:spTree>
+      <p:nvGrpSpPr>
+        <p:cNvPr id="1" name=""/>
+        <p:cNvGrpSpPr/>
+        <p:nvPr/>
+      </p:nvGrpSpPr>
+      <p:grpSpPr/>
+      <p:pic>
+        <p:nvPicPr>
+          <p:cNvPr id="4" name="图片 3"/>
+          <p:cNvPicPr>
+            <a:picLocks noChangeAspect="1"/>
+          </p:cNvPicPr>
+          <p:nvPr/>
+        </p:nvPicPr>
+        <p:blipFill>
+          <a:blip r:embed="rId1"/>
+          <a:stretch>
+            <a:fillRect/>
+          </a:stretch>
+        </p:blipFill>
+        <p:spPr>
+          <a:xfrm>
+            <a:off x="659130" y="1699260"/>
+            <a:ext cx="7533005" cy="4751070"/>
+          </a:xfrm>
+          <a:prstGeom prst="rect">
+            <a:avLst/>
+          </a:prstGeom>
+        </p:spPr>
+      </p:pic>
+      <p:sp>
+        <p:nvSpPr>
+          <p:cNvPr id="2" name="Rectangle 1"/>
+          <p:cNvSpPr/>
+          <p:nvPr/>
+        </p:nvSpPr>
+        <p:spPr>
+          <a:xfrm>
+            <a:off x="0" y="0"/>
+            <a:ext cx="12191695" cy="1097280"/>
+          </a:xfrm>
+          <a:prstGeom prst="rect">
+            <a:avLst/>
+          </a:prstGeom>
+          <a:solidFill>
+            <a:srgbClr val="2563EB"/>
+          </a:solidFill>
+          <a:ln>
+            <a:noFill/>
+          </a:ln>
+        </p:spPr>
+        <p:style>
+          <a:lnRef idx="1">
+            <a:schemeClr val="accent1"/>
+          </a:lnRef>
+          <a:fillRef idx="3">
+            <a:schemeClr val="accent1"/>
+          </a:fillRef>
+          <a:effectRef idx="2">
+            <a:schemeClr val="accent1"/>
+          </a:effectRef>
+          <a:fontRef idx="minor">
+            <a:schemeClr val="lt1"/>
+          </a:fontRef>
+        </p:style>
+        <p:txBody>
+          <a:bodyPr rtlCol="0" anchor="ctr"/>
+          <a:lstStyle/>
+          <a:p>
+            <a:pPr algn="ctr"/>
+          </a:p>
+        </p:txBody>
+      </p:sp>
+      <p:sp>
+        <p:nvSpPr>
+          <p:cNvPr id="3" name="TextBox 2"/>
+          <p:cNvSpPr txBox="1"/>
+          <p:nvPr/>
+        </p:nvSpPr>
+        <p:spPr>
+          <a:xfrm>
+            <a:off x="457200" y="228600"/>
+            <a:ext cx="10972800" cy="731520"/>
+          </a:xfrm>
+          <a:prstGeom prst="rect">
+            <a:avLst/>
+          </a:prstGeom>
+          <a:noFill/>
+        </p:spPr>
+        <p:txBody>
+          <a:bodyPr wrap="none">
+            <a:spAutoFit/>
+          </a:bodyPr>
+          <a:lstStyle/>
+          <a:p>
+            <a:r>
+              <a:rPr sz="3000" b="1">
+                <a:solidFill>
+                  <a:srgbClr val="FFFFFF"/>
+                </a:solidFill>
+                <a:latin typeface="微软雅黑"/>
+              </a:rPr>
+              <a:t>4. 成果验证</a:t>
+            </a:r>
+            <a:endParaRPr sz="3000" b="1">
+              <a:solidFill>
+                <a:srgbClr val="FFFFFF"/>
+              </a:solidFill>
+              <a:latin typeface="微软雅黑"/>
+            </a:endParaRPr>
+          </a:p>
+        </p:txBody>
+      </p:sp>
+      <p:sp>
+        <p:nvSpPr>
+          <p:cNvPr id="6" name="文本框 5"/>
+          <p:cNvSpPr txBox="1"/>
+          <p:nvPr/>
+        </p:nvSpPr>
+        <p:spPr>
+          <a:xfrm>
+            <a:off x="6360160" y="1778000"/>
+            <a:ext cx="4064000" cy="368300"/>
+          </a:xfrm>
+          <a:prstGeom prst="rect">
+            <a:avLst/>
+          </a:prstGeom>
+          <a:noFill/>
+        </p:spPr>
+        <p:txBody>
+          <a:bodyPr wrap="square" rtlCol="0">
+            <a:spAutoFit/>
+          </a:bodyPr>
+          <a:p>
+            <a:r>
+              <a:rPr lang="zh-CN" altLang="en-US"/>
+              <a:t>框内为精简模式</a:t>
+            </a:r>
+            <a:endParaRPr lang="zh-CN" altLang="en-US"/>
+          </a:p>
+        </p:txBody>
+      </p:sp>
+      <p:sp>
+        <p:nvSpPr>
+          <p:cNvPr id="7" name="矩形 6"/>
+          <p:cNvSpPr/>
+          <p:nvPr/>
+        </p:nvSpPr>
+        <p:spPr>
+          <a:xfrm>
+            <a:off x="2863215" y="1699260"/>
+            <a:ext cx="3496945" cy="526415"/>
+          </a:xfrm>
+          <a:prstGeom prst="rect">
+            <a:avLst/>
+          </a:prstGeom>
+          <a:noFill/>
+          <a:ln w="38100"/>
+          <a:extLst>
+            <a:ext uri="{909E8E84-426E-40DD-AFC4-6F175D3DCCD1}">
+              <a14:hiddenFill xmlns:a14="http://schemas.microsoft.com/office/drawing/2010/main">
+                <a:gradFill rotWithShape="1">
+                  <a:gsLst>
+                    <a:gs pos="0">
+                      <a:schemeClr val="accent1">
+                        <a:tint val="100000"/>
+                        <a:shade val="100000"/>
+                        <a:satMod val="130000"/>
+                      </a:schemeClr>
+                    </a:gs>
+                    <a:gs pos="100000">
+                      <a:schemeClr val="accent1">
+                        <a:tint val="50000"/>
+                        <a:shade val="100000"/>
+                        <a:satMod val="350000"/>
+                      </a:schemeClr>
+                    </a:gs>
+                  </a:gsLst>
+                  <a:lin ang="16200000" scaled="0"/>
+                </a:gradFill>
+              </a14:hiddenFill>
+            </a:ext>
+          </a:extLst>
+        </p:spPr>
+        <p:style>
+          <a:lnRef idx="1">
+            <a:schemeClr val="accent1"/>
+          </a:lnRef>
+          <a:fillRef idx="3">
+            <a:schemeClr val="accent1"/>
+          </a:fillRef>
+          <a:effectRef idx="2">
+            <a:schemeClr val="accent1"/>
+          </a:effectRef>
+          <a:fontRef idx="minor">
+            <a:schemeClr val="lt1"/>
+          </a:fontRef>
+        </p:style>
+        <p:txBody>
+          <a:bodyPr/>
+          <a:p>
+            <a:endParaRPr lang="zh-CN" altLang="en-US"/>
           </a:p>
         </p:txBody>
       </p:sp>
